--- a/topic-000-Assessments/talk-1/spec_1.pptx
+++ b/topic-000-Assessments/talk-1/spec_1.pptx
@@ -2470,7 +2470,7 @@
         <a:p>
           <a:r>
             <a:rPr lang="en-US" dirty="0"/>
-            <a:t>April 11 (Week 9)</a:t>
+            <a:t>April 10 </a:t>
           </a:r>
           <a:endParaRPr lang="en-US" baseline="30000" dirty="0"/>
         </a:p>
@@ -2687,7 +2687,7 @@
         <a:p>
           <a:r>
             <a:rPr lang="en-US" baseline="0" dirty="0"/>
-            <a:t>May 2(Week12)</a:t>
+            <a:t>May 1(Week12)</a:t>
           </a:r>
           <a:endParaRPr lang="en-US" dirty="0"/>
         </a:p>
@@ -3889,7 +3889,7 @@
         </a:bodyPr>
         <a:lstStyle/>
         <a:p>
-          <a:pPr marL="0" lvl="0" indent="0" algn="ctr" defTabSz="977900">
+          <a:pPr marL="0" lvl="0" indent="0" algn="ctr" defTabSz="1022350">
             <a:lnSpc>
               <a:spcPct val="90000"/>
             </a:lnSpc>
@@ -3902,7 +3902,7 @@
             <a:buNone/>
           </a:pPr>
           <a:r>
-            <a:rPr lang="en-US" sz="2200" kern="1200" dirty="0"/>
+            <a:rPr lang="en-US" sz="2300" kern="1200" dirty="0"/>
             <a:t>Mar 20(Week 7)</a:t>
           </a:r>
         </a:p>
@@ -4159,7 +4159,7 @@
         </a:bodyPr>
         <a:lstStyle/>
         <a:p>
-          <a:pPr marL="0" lvl="0" indent="0" algn="ctr" defTabSz="977900">
+          <a:pPr marL="0" lvl="0" indent="0" algn="ctr" defTabSz="1022350">
             <a:lnSpc>
               <a:spcPct val="90000"/>
             </a:lnSpc>
@@ -4172,10 +4172,10 @@
             <a:buNone/>
           </a:pPr>
           <a:r>
-            <a:rPr lang="en-US" sz="2200" kern="1200" dirty="0"/>
-            <a:t>April 11 (Week 9)</a:t>
+            <a:rPr lang="en-US" sz="2300" kern="1200" dirty="0"/>
+            <a:t>April 10 </a:t>
           </a:r>
-          <a:endParaRPr lang="en-US" sz="2200" kern="1200" baseline="30000" dirty="0"/>
+          <a:endParaRPr lang="en-US" sz="2300" kern="1200" baseline="30000" dirty="0"/>
         </a:p>
       </dsp:txBody>
       <dsp:txXfrm>
@@ -4422,7 +4422,7 @@
         </a:bodyPr>
         <a:lstStyle/>
         <a:p>
-          <a:pPr marL="0" lvl="0" indent="0" algn="ctr" defTabSz="977900">
+          <a:pPr marL="0" lvl="0" indent="0" algn="ctr" defTabSz="1022350">
             <a:lnSpc>
               <a:spcPct val="90000"/>
             </a:lnSpc>
@@ -4435,10 +4435,10 @@
             <a:buNone/>
           </a:pPr>
           <a:r>
-            <a:rPr lang="en-US" sz="2200" kern="1200" baseline="0" dirty="0"/>
-            <a:t>May 2(Week12)</a:t>
+            <a:rPr lang="en-US" sz="2300" kern="1200" baseline="0" dirty="0"/>
+            <a:t>May 1(Week12)</a:t>
           </a:r>
-          <a:endParaRPr lang="en-US" sz="2200" kern="1200" dirty="0"/>
+          <a:endParaRPr lang="en-US" sz="2300" kern="1200" dirty="0"/>
         </a:p>
       </dsp:txBody>
       <dsp:txXfrm>
@@ -4667,7 +4667,7 @@
         </a:bodyPr>
         <a:lstStyle/>
         <a:p>
-          <a:pPr marL="0" lvl="0" indent="0" algn="ctr" defTabSz="977900">
+          <a:pPr marL="0" lvl="0" indent="0" algn="ctr" defTabSz="1022350">
             <a:lnSpc>
               <a:spcPct val="90000"/>
             </a:lnSpc>
@@ -4680,7 +4680,7 @@
             <a:buNone/>
           </a:pPr>
           <a:r>
-            <a:rPr lang="en-US" sz="2200" kern="1200" dirty="0"/>
+            <a:rPr lang="en-US" sz="2300" kern="1200" dirty="0"/>
             <a:t>May (Week 13)</a:t>
           </a:r>
         </a:p>
@@ -7390,7 +7390,7 @@
           <a:p>
             <a:fld id="{579B9E99-C503-46FF-BA39-A9A967032C6C}" type="datetimeFigureOut">
               <a:rPr lang="en-US"/>
-              <a:t>3/14/2025</a:t>
+              <a:t>3/9/2026</a:t>
             </a:fld>
             <a:endParaRPr lang="en-US"/>
           </a:p>
@@ -8206,7 +8206,7 @@
           <a:p>
             <a:fld id="{846CE7D5-CF57-46EF-B807-FDD0502418D4}" type="datetimeFigureOut">
               <a:rPr lang="en-US" smtClean="0"/>
-              <a:t>3/14/2025</a:t>
+              <a:t>3/9/2026</a:t>
             </a:fld>
             <a:endParaRPr lang="en-US"/>
           </a:p>
@@ -8374,7 +8374,7 @@
           <a:p>
             <a:fld id="{846CE7D5-CF57-46EF-B807-FDD0502418D4}" type="datetimeFigureOut">
               <a:rPr lang="en-US" smtClean="0"/>
-              <a:t>3/14/2025</a:t>
+              <a:t>3/9/2026</a:t>
             </a:fld>
             <a:endParaRPr lang="en-US"/>
           </a:p>
@@ -8552,7 +8552,7 @@
           <a:p>
             <a:fld id="{846CE7D5-CF57-46EF-B807-FDD0502418D4}" type="datetimeFigureOut">
               <a:rPr lang="en-US" smtClean="0"/>
-              <a:t>3/14/2025</a:t>
+              <a:t>3/9/2026</a:t>
             </a:fld>
             <a:endParaRPr lang="en-US"/>
           </a:p>
@@ -8720,7 +8720,7 @@
           <a:p>
             <a:fld id="{846CE7D5-CF57-46EF-B807-FDD0502418D4}" type="datetimeFigureOut">
               <a:rPr lang="en-US" smtClean="0"/>
-              <a:t>3/14/2025</a:t>
+              <a:t>3/9/2026</a:t>
             </a:fld>
             <a:endParaRPr lang="en-US"/>
           </a:p>
@@ -8965,7 +8965,7 @@
           <a:p>
             <a:fld id="{846CE7D5-CF57-46EF-B807-FDD0502418D4}" type="datetimeFigureOut">
               <a:rPr lang="en-US" smtClean="0"/>
-              <a:t>3/14/2025</a:t>
+              <a:t>3/9/2026</a:t>
             </a:fld>
             <a:endParaRPr lang="en-US"/>
           </a:p>
@@ -9194,7 +9194,7 @@
           <a:p>
             <a:fld id="{846CE7D5-CF57-46EF-B807-FDD0502418D4}" type="datetimeFigureOut">
               <a:rPr lang="en-US" smtClean="0"/>
-              <a:t>3/14/2025</a:t>
+              <a:t>3/9/2026</a:t>
             </a:fld>
             <a:endParaRPr lang="en-US"/>
           </a:p>
@@ -9558,7 +9558,7 @@
           <a:p>
             <a:fld id="{846CE7D5-CF57-46EF-B807-FDD0502418D4}" type="datetimeFigureOut">
               <a:rPr lang="en-US" smtClean="0"/>
-              <a:t>3/14/2025</a:t>
+              <a:t>3/9/2026</a:t>
             </a:fld>
             <a:endParaRPr lang="en-US"/>
           </a:p>
@@ -9675,7 +9675,7 @@
           <a:p>
             <a:fld id="{846CE7D5-CF57-46EF-B807-FDD0502418D4}" type="datetimeFigureOut">
               <a:rPr lang="en-US" smtClean="0"/>
-              <a:t>3/14/2025</a:t>
+              <a:t>3/9/2026</a:t>
             </a:fld>
             <a:endParaRPr lang="en-US"/>
           </a:p>
@@ -9770,7 +9770,7 @@
           <a:p>
             <a:fld id="{846CE7D5-CF57-46EF-B807-FDD0502418D4}" type="datetimeFigureOut">
               <a:rPr lang="en-US" smtClean="0"/>
-              <a:t>3/14/2025</a:t>
+              <a:t>3/9/2026</a:t>
             </a:fld>
             <a:endParaRPr lang="en-US"/>
           </a:p>
@@ -10045,7 +10045,7 @@
           <a:p>
             <a:fld id="{846CE7D5-CF57-46EF-B807-FDD0502418D4}" type="datetimeFigureOut">
               <a:rPr lang="en-US" smtClean="0"/>
-              <a:t>3/14/2025</a:t>
+              <a:t>3/9/2026</a:t>
             </a:fld>
             <a:endParaRPr lang="en-US"/>
           </a:p>
@@ -10300,7 +10300,7 @@
           <a:p>
             <a:fld id="{846CE7D5-CF57-46EF-B807-FDD0502418D4}" type="datetimeFigureOut">
               <a:rPr lang="en-US" smtClean="0"/>
-              <a:t>3/14/2025</a:t>
+              <a:t>3/9/2026</a:t>
             </a:fld>
             <a:endParaRPr lang="en-US"/>
           </a:p>
@@ -10511,7 +10511,7 @@
           <a:p>
             <a:fld id="{846CE7D5-CF57-46EF-B807-FDD0502418D4}" type="datetimeFigureOut">
               <a:rPr lang="en-US" smtClean="0"/>
-              <a:t>3/14/2025</a:t>
+              <a:t>3/9/2026</a:t>
             </a:fld>
             <a:endParaRPr lang="en-US"/>
           </a:p>
@@ -11489,7 +11489,7 @@
             </a:r>
             <a:r>
               <a:rPr lang="en-GB" dirty="0"/>
-              <a:t> Visualizes and actuates responses.</a:t>
+              <a:t> Visualises and actuates responses.</a:t>
             </a:r>
             <a:endParaRPr lang="en-IE" dirty="0"/>
           </a:p>
@@ -11575,7 +11575,7 @@
           <p:nvPr>
             <p:extLst>
               <p:ext uri="{D42A27DB-BD31-4B8C-83A1-F6EECF244321}">
-                <p14:modId xmlns:p14="http://schemas.microsoft.com/office/powerpoint/2010/main" val="968240343"/>
+                <p14:modId xmlns:p14="http://schemas.microsoft.com/office/powerpoint/2010/main" val="1135875101"/>
               </p:ext>
             </p:extLst>
           </p:nvPr>
@@ -11671,10 +11671,10 @@
       </p:sp>
       <p:pic>
         <p:nvPicPr>
-          <p:cNvPr id="4" name="Picture 3">
+          <p:cNvPr id="9" name="Picture 8">
             <a:extLst>
               <a:ext uri="{FF2B5EF4-FFF2-40B4-BE49-F238E27FC236}">
-                <a16:creationId xmlns:a16="http://schemas.microsoft.com/office/drawing/2014/main" id="{53E1C07B-FA16-02E6-27D6-DFD12F57F7AF}"/>
+                <a16:creationId xmlns:a16="http://schemas.microsoft.com/office/drawing/2014/main" id="{DE573C92-B0A6-B3FD-FF7C-FF2B5D3E2BE7}"/>
               </a:ext>
             </a:extLst>
           </p:cNvPr>
@@ -11691,8 +11691,8 @@
         </p:blipFill>
         <p:spPr>
           <a:xfrm>
-            <a:off x="635883" y="136875"/>
-            <a:ext cx="9261531" cy="6621044"/>
+            <a:off x="658531" y="100081"/>
+            <a:ext cx="9380989" cy="6858000"/>
           </a:xfrm>
           <a:prstGeom prst="rect">
             <a:avLst/>
